--- a/exports/pptx/lessons/middle-module-04-doshas/day-02-three-doshas.pptx
+++ b/exports/pptx/lessons/middle-module-04-doshas/day-02-three-doshas.pptx
@@ -5254,7 +5254,449 @@
         </p:nvSpPr>
         <p:spPr>
           <a:xfrm>
-            <a:off x="634901" y="4536579"/>
+            <a:off x="406301" y="3359200"/>
+            <a:ext cx="8498026" cy="213271"/>
+          </a:xfrm>
+          <a:prstGeom prst="rect">
+            <a:avLst/>
+          </a:prstGeom>
+          <a:noFill/>
+          <a:ln/>
+        </p:spPr>
+        <p:txBody>
+          <a:bodyPr wrap="square" lIns="0" tIns="0" rIns="0" bIns="0" rtlCol="0" anchor="t"/>
+          <a:lstStyle/>
+          <a:p>
+            <a:pPr algn="l" indent="0" marL="0">
+              <a:lnSpc>
+                <a:spcPts val="1680"/>
+              </a:lnSpc>
+              <a:spcBef>
+                <a:spcPts val="300"/>
+              </a:spcBef>
+              <a:spcAft>
+                <a:spcPts val="300"/>
+              </a:spcAft>
+              <a:buNone/>
+            </a:pPr>
+            <a:r>
+              <a:rPr lang="en-US" sz="1200" i="1" dirty="0">
+                <a:solidFill>
+                  <a:srgbClr val="1C2833"/>
+                </a:solidFill>
+                <a:latin typeface="Arial" pitchFamily="34" charset="0"/>
+                <a:ea typeface="Arial" pitchFamily="34" charset="-122"/>
+                <a:cs typeface="Arial" pitchFamily="34" charset="-120"/>
+              </a:rPr>
+              <a:t>Each row: Doṣa · Elements · Three key qualities · Main site in body · One everyday sign.</a:t>
+            </a:r>
+            <a:endParaRPr lang="en-US" sz="1200" dirty="0"/>
+          </a:p>
+        </p:txBody>
+      </p:sp>
+      <p:sp>
+        <p:nvSpPr>
+          <p:cNvPr id="10" name="Text 8"/>
+          <p:cNvSpPr/>
+          <p:nvPr/>
+        </p:nvSpPr>
+        <p:spPr>
+          <a:xfrm>
+            <a:off x="634901" y="3661321"/>
+            <a:ext cx="8102798" cy="769441"/>
+          </a:xfrm>
+          <a:prstGeom prst="rect">
+            <a:avLst/>
+          </a:prstGeom>
+          <a:noFill/>
+          <a:ln/>
+        </p:spPr>
+        <p:txBody>
+          <a:bodyPr wrap="square" lIns="0" tIns="0" rIns="0" bIns="0" rtlCol="0" anchor="t"/>
+          <a:lstStyle/>
+          <a:p>
+            <a:pPr algn="l" marL="342900" indent="-342900">
+              <a:lnSpc>
+                <a:spcPts val="1620"/>
+              </a:lnSpc>
+              <a:spcAft>
+                <a:spcPts val="300"/>
+              </a:spcAft>
+              <a:buSzPct val="100000"/>
+              <a:buChar char="•"/>
+            </a:pPr>
+            <a:r>
+              <a:rPr lang="en-US" sz="1200" i="1" dirty="0">
+                <a:solidFill>
+                  <a:srgbClr val="1C2833"/>
+                </a:solidFill>
+                <a:latin typeface="Arial" pitchFamily="34" charset="0"/>
+                <a:ea typeface="Arial" pitchFamily="34" charset="-122"/>
+                <a:cs typeface="Arial" pitchFamily="34" charset="-120"/>
+              </a:rPr>
+              <a:t>vāta</a:t>
+            </a:r>
+            <a:pPr algn="l" indent="0" marL="0">
+              <a:lnSpc>
+                <a:spcPts val="1620"/>
+              </a:lnSpc>
+              <a:spcAft>
+                <a:spcPts val="300"/>
+              </a:spcAft>
+              <a:buNone/>
+            </a:pPr>
+            <a:r>
+              <a:rPr lang="en-US" sz="1200" dirty="0">
+                <a:solidFill>
+                  <a:srgbClr val="1C2833"/>
+                </a:solidFill>
+                <a:latin typeface="Arial" pitchFamily="34" charset="0"/>
+                <a:ea typeface="Arial" pitchFamily="34" charset="-122"/>
+                <a:cs typeface="Arial" pitchFamily="34" charset="-120"/>
+              </a:rPr>
+              <a:t> — </a:t>
+            </a:r>
+            <a:pPr algn="l" indent="0" marL="0">
+              <a:lnSpc>
+                <a:spcPts val="1620"/>
+              </a:lnSpc>
+              <a:spcAft>
+                <a:spcPts val="300"/>
+              </a:spcAft>
+              <a:buNone/>
+            </a:pPr>
+            <a:r>
+              <a:rPr lang="en-US" sz="1200" i="1" dirty="0">
+                <a:solidFill>
+                  <a:srgbClr val="1C2833"/>
+                </a:solidFill>
+                <a:latin typeface="Arial" pitchFamily="34" charset="0"/>
+                <a:ea typeface="Arial" pitchFamily="34" charset="-122"/>
+                <a:cs typeface="Arial" pitchFamily="34" charset="-120"/>
+              </a:rPr>
+              <a:t>ākāśa</a:t>
+            </a:r>
+            <a:pPr algn="l" indent="0" marL="0">
+              <a:lnSpc>
+                <a:spcPts val="1620"/>
+              </a:lnSpc>
+              <a:spcAft>
+                <a:spcPts val="300"/>
+              </a:spcAft>
+              <a:buNone/>
+            </a:pPr>
+            <a:r>
+              <a:rPr lang="en-US" sz="1200" dirty="0">
+                <a:solidFill>
+                  <a:srgbClr val="1C2833"/>
+                </a:solidFill>
+                <a:latin typeface="Arial" pitchFamily="34" charset="0"/>
+                <a:ea typeface="Arial" pitchFamily="34" charset="-122"/>
+                <a:cs typeface="Arial" pitchFamily="34" charset="-120"/>
+              </a:rPr>
+              <a:t> + </a:t>
+            </a:r>
+            <a:pPr algn="l" indent="0" marL="0">
+              <a:lnSpc>
+                <a:spcPts val="1620"/>
+              </a:lnSpc>
+              <a:spcAft>
+                <a:spcPts val="300"/>
+              </a:spcAft>
+              <a:buNone/>
+            </a:pPr>
+            <a:r>
+              <a:rPr lang="en-US" sz="1200" i="1" dirty="0">
+                <a:solidFill>
+                  <a:srgbClr val="1C2833"/>
+                </a:solidFill>
+                <a:latin typeface="Arial" pitchFamily="34" charset="0"/>
+                <a:ea typeface="Arial" pitchFamily="34" charset="-122"/>
+                <a:cs typeface="Arial" pitchFamily="34" charset="-120"/>
+              </a:rPr>
+              <a:t>vāyu</a:t>
+            </a:r>
+            <a:pPr algn="l" indent="0" marL="0">
+              <a:lnSpc>
+                <a:spcPts val="1620"/>
+              </a:lnSpc>
+              <a:spcAft>
+                <a:spcPts val="300"/>
+              </a:spcAft>
+              <a:buNone/>
+            </a:pPr>
+            <a:r>
+              <a:rPr lang="en-US" sz="1200" dirty="0">
+                <a:solidFill>
+                  <a:srgbClr val="1C2833"/>
+                </a:solidFill>
+                <a:latin typeface="Arial" pitchFamily="34" charset="0"/>
+                <a:ea typeface="Arial" pitchFamily="34" charset="-122"/>
+                <a:cs typeface="Arial" pitchFamily="34" charset="-120"/>
+              </a:rPr>
+              <a:t> · dry, cold, mobile · colon, lower body · dry skin, fast speech, fidget</a:t>
+            </a:r>
+            <a:endParaRPr lang="en-US" sz="1200" dirty="0"/>
+          </a:p>
+          <a:p>
+            <a:pPr algn="l" marL="342900" indent="-342900">
+              <a:lnSpc>
+                <a:spcPts val="1620"/>
+              </a:lnSpc>
+              <a:spcAft>
+                <a:spcPts val="300"/>
+              </a:spcAft>
+              <a:buSzPct val="100000"/>
+              <a:buChar char="•"/>
+            </a:pPr>
+            <a:r>
+              <a:rPr lang="en-US" sz="1200" i="1" dirty="0">
+                <a:solidFill>
+                  <a:srgbClr val="1C2833"/>
+                </a:solidFill>
+                <a:latin typeface="Arial" pitchFamily="34" charset="0"/>
+                <a:ea typeface="Arial" pitchFamily="34" charset="-122"/>
+                <a:cs typeface="Arial" pitchFamily="34" charset="-120"/>
+              </a:rPr>
+              <a:t>pitta</a:t>
+            </a:r>
+            <a:pPr algn="l" indent="0" marL="0">
+              <a:lnSpc>
+                <a:spcPts val="1620"/>
+              </a:lnSpc>
+              <a:spcAft>
+                <a:spcPts val="300"/>
+              </a:spcAft>
+              <a:buNone/>
+            </a:pPr>
+            <a:r>
+              <a:rPr lang="en-US" sz="1200" dirty="0">
+                <a:solidFill>
+                  <a:srgbClr val="1C2833"/>
+                </a:solidFill>
+                <a:latin typeface="Arial" pitchFamily="34" charset="0"/>
+                <a:ea typeface="Arial" pitchFamily="34" charset="-122"/>
+                <a:cs typeface="Arial" pitchFamily="34" charset="-120"/>
+              </a:rPr>
+              <a:t> — </a:t>
+            </a:r>
+            <a:pPr algn="l" indent="0" marL="0">
+              <a:lnSpc>
+                <a:spcPts val="1620"/>
+              </a:lnSpc>
+              <a:spcAft>
+                <a:spcPts val="300"/>
+              </a:spcAft>
+              <a:buNone/>
+            </a:pPr>
+            <a:r>
+              <a:rPr lang="en-US" sz="1200" i="1" dirty="0">
+                <a:solidFill>
+                  <a:srgbClr val="1C2833"/>
+                </a:solidFill>
+                <a:latin typeface="Arial" pitchFamily="34" charset="0"/>
+                <a:ea typeface="Arial" pitchFamily="34" charset="-122"/>
+                <a:cs typeface="Arial" pitchFamily="34" charset="-120"/>
+              </a:rPr>
+              <a:t>tejas</a:t>
+            </a:r>
+            <a:pPr algn="l" indent="0" marL="0">
+              <a:lnSpc>
+                <a:spcPts val="1620"/>
+              </a:lnSpc>
+              <a:spcAft>
+                <a:spcPts val="300"/>
+              </a:spcAft>
+              <a:buNone/>
+            </a:pPr>
+            <a:r>
+              <a:rPr lang="en-US" sz="1200" dirty="0">
+                <a:solidFill>
+                  <a:srgbClr val="1C2833"/>
+                </a:solidFill>
+                <a:latin typeface="Arial" pitchFamily="34" charset="0"/>
+                <a:ea typeface="Arial" pitchFamily="34" charset="-122"/>
+                <a:cs typeface="Arial" pitchFamily="34" charset="-120"/>
+              </a:rPr>
+              <a:t> + </a:t>
+            </a:r>
+            <a:pPr algn="l" indent="0" marL="0">
+              <a:lnSpc>
+                <a:spcPts val="1620"/>
+              </a:lnSpc>
+              <a:spcAft>
+                <a:spcPts val="300"/>
+              </a:spcAft>
+              <a:buNone/>
+            </a:pPr>
+            <a:r>
+              <a:rPr lang="en-US" sz="1200" i="1" dirty="0">
+                <a:solidFill>
+                  <a:srgbClr val="1C2833"/>
+                </a:solidFill>
+                <a:latin typeface="Arial" pitchFamily="34" charset="0"/>
+                <a:ea typeface="Arial" pitchFamily="34" charset="-122"/>
+                <a:cs typeface="Arial" pitchFamily="34" charset="-120"/>
+              </a:rPr>
+              <a:t>ap</a:t>
+            </a:r>
+            <a:pPr algn="l" indent="0" marL="0">
+              <a:lnSpc>
+                <a:spcPts val="1620"/>
+              </a:lnSpc>
+              <a:spcAft>
+                <a:spcPts val="300"/>
+              </a:spcAft>
+              <a:buNone/>
+            </a:pPr>
+            <a:r>
+              <a:rPr lang="en-US" sz="1200" dirty="0">
+                <a:solidFill>
+                  <a:srgbClr val="1C2833"/>
+                </a:solidFill>
+                <a:latin typeface="Arial" pitchFamily="34" charset="0"/>
+                <a:ea typeface="Arial" pitchFamily="34" charset="-122"/>
+                <a:cs typeface="Arial" pitchFamily="34" charset="-120"/>
+              </a:rPr>
+              <a:t> · hot, sharp, oily · small intestine, eyes · strong appetite, sharp focus, sweating</a:t>
+            </a:r>
+            <a:endParaRPr lang="en-US" sz="1200" dirty="0"/>
+          </a:p>
+          <a:p>
+            <a:pPr algn="l" marL="342900" indent="-342900">
+              <a:lnSpc>
+                <a:spcPts val="1620"/>
+              </a:lnSpc>
+              <a:spcAft>
+                <a:spcPts val="300"/>
+              </a:spcAft>
+              <a:buSzPct val="100000"/>
+              <a:buChar char="•"/>
+            </a:pPr>
+            <a:r>
+              <a:rPr lang="en-US" sz="1200" i="1" dirty="0">
+                <a:solidFill>
+                  <a:srgbClr val="1C2833"/>
+                </a:solidFill>
+                <a:latin typeface="Arial" pitchFamily="34" charset="0"/>
+                <a:ea typeface="Arial" pitchFamily="34" charset="-122"/>
+                <a:cs typeface="Arial" pitchFamily="34" charset="-120"/>
+              </a:rPr>
+              <a:t>kapha</a:t>
+            </a:r>
+            <a:pPr algn="l" indent="0" marL="0">
+              <a:lnSpc>
+                <a:spcPts val="1620"/>
+              </a:lnSpc>
+              <a:spcAft>
+                <a:spcPts val="300"/>
+              </a:spcAft>
+              <a:buNone/>
+            </a:pPr>
+            <a:r>
+              <a:rPr lang="en-US" sz="1200" dirty="0">
+                <a:solidFill>
+                  <a:srgbClr val="1C2833"/>
+                </a:solidFill>
+                <a:latin typeface="Arial" pitchFamily="34" charset="0"/>
+                <a:ea typeface="Arial" pitchFamily="34" charset="-122"/>
+                <a:cs typeface="Arial" pitchFamily="34" charset="-120"/>
+              </a:rPr>
+              <a:t> — </a:t>
+            </a:r>
+            <a:pPr algn="l" indent="0" marL="0">
+              <a:lnSpc>
+                <a:spcPts val="1620"/>
+              </a:lnSpc>
+              <a:spcAft>
+                <a:spcPts val="300"/>
+              </a:spcAft>
+              <a:buNone/>
+            </a:pPr>
+            <a:r>
+              <a:rPr lang="en-US" sz="1200" i="1" dirty="0">
+                <a:solidFill>
+                  <a:srgbClr val="1C2833"/>
+                </a:solidFill>
+                <a:latin typeface="Arial" pitchFamily="34" charset="0"/>
+                <a:ea typeface="Arial" pitchFamily="34" charset="-122"/>
+                <a:cs typeface="Arial" pitchFamily="34" charset="-120"/>
+              </a:rPr>
+              <a:t>ap</a:t>
+            </a:r>
+            <a:pPr algn="l" indent="0" marL="0">
+              <a:lnSpc>
+                <a:spcPts val="1620"/>
+              </a:lnSpc>
+              <a:spcAft>
+                <a:spcPts val="300"/>
+              </a:spcAft>
+              <a:buNone/>
+            </a:pPr>
+            <a:r>
+              <a:rPr lang="en-US" sz="1200" dirty="0">
+                <a:solidFill>
+                  <a:srgbClr val="1C2833"/>
+                </a:solidFill>
+                <a:latin typeface="Arial" pitchFamily="34" charset="0"/>
+                <a:ea typeface="Arial" pitchFamily="34" charset="-122"/>
+                <a:cs typeface="Arial" pitchFamily="34" charset="-120"/>
+              </a:rPr>
+              <a:t> + </a:t>
+            </a:r>
+            <a:pPr algn="l" indent="0" marL="0">
+              <a:lnSpc>
+                <a:spcPts val="1620"/>
+              </a:lnSpc>
+              <a:spcAft>
+                <a:spcPts val="300"/>
+              </a:spcAft>
+              <a:buNone/>
+            </a:pPr>
+            <a:r>
+              <a:rPr lang="en-US" sz="1200" i="1" dirty="0">
+                <a:solidFill>
+                  <a:srgbClr val="1C2833"/>
+                </a:solidFill>
+                <a:latin typeface="Arial" pitchFamily="34" charset="0"/>
+                <a:ea typeface="Arial" pitchFamily="34" charset="-122"/>
+                <a:cs typeface="Arial" pitchFamily="34" charset="-120"/>
+              </a:rPr>
+              <a:t>pṛthvī</a:t>
+            </a:r>
+            <a:pPr algn="l" indent="0" marL="0">
+              <a:lnSpc>
+                <a:spcPts val="1620"/>
+              </a:lnSpc>
+              <a:spcAft>
+                <a:spcPts val="300"/>
+              </a:spcAft>
+              <a:buNone/>
+            </a:pPr>
+            <a:r>
+              <a:rPr lang="en-US" sz="1200" dirty="0">
+                <a:solidFill>
+                  <a:srgbClr val="1C2833"/>
+                </a:solidFill>
+                <a:latin typeface="Arial" pitchFamily="34" charset="0"/>
+                <a:ea typeface="Arial" pitchFamily="34" charset="-122"/>
+                <a:cs typeface="Arial" pitchFamily="34" charset="-120"/>
+              </a:rPr>
+              <a:t> · heavy, slow, cool · stomach, chest · steady stamina, heavy sleeper, slow morning</a:t>
+            </a:r>
+            <a:endParaRPr lang="en-US" sz="1200" dirty="0"/>
+          </a:p>
+        </p:txBody>
+      </p:sp>
+      <p:sp>
+        <p:nvSpPr>
+          <p:cNvPr id="11" name="Text 9"/>
+          <p:cNvSpPr/>
+          <p:nvPr/>
+        </p:nvSpPr>
+        <p:spPr>
+          <a:xfrm>
+            <a:off x="634901" y="4532263"/>
             <a:ext cx="8102798" cy="898922"/>
           </a:xfrm>
           <a:prstGeom prst="rect">
@@ -5714,13 +6156,13 @@
       </p:sp>
       <p:sp>
         <p:nvSpPr>
-          <p:cNvPr id="10" name="Text 8"/>
+          <p:cNvPr id="12" name="Text 10"/>
           <p:cNvSpPr/>
           <p:nvPr/>
         </p:nvSpPr>
         <p:spPr>
           <a:xfrm>
-            <a:off x="634901" y="5537002"/>
+            <a:off x="634901" y="5532686"/>
             <a:ext cx="8102798" cy="281880"/>
           </a:xfrm>
           <a:prstGeom prst="rect">
@@ -5780,13 +6222,13 @@
       </p:sp>
       <p:sp>
         <p:nvSpPr>
-          <p:cNvPr id="11" name="Text 9"/>
+          <p:cNvPr id="13" name="Text 11"/>
           <p:cNvSpPr/>
           <p:nvPr/>
         </p:nvSpPr>
         <p:spPr>
           <a:xfrm>
-            <a:off x="406301" y="5907732"/>
+            <a:off x="406301" y="5903416"/>
             <a:ext cx="8498026" cy="426541"/>
           </a:xfrm>
           <a:prstGeom prst="rect">
@@ -5920,13 +6362,13 @@
       </p:sp>
       <p:sp>
         <p:nvSpPr>
-          <p:cNvPr id="12" name="Text 10"/>
+          <p:cNvPr id="14" name="Text 12"/>
           <p:cNvSpPr/>
           <p:nvPr/>
         </p:nvSpPr>
         <p:spPr>
           <a:xfrm>
-            <a:off x="406301" y="6410474"/>
+            <a:off x="406301" y="6406158"/>
             <a:ext cx="8498026" cy="426541"/>
           </a:xfrm>
           <a:prstGeom prst="rect">
@@ -6106,13 +6548,13 @@
       </p:sp>
       <p:sp>
         <p:nvSpPr>
-          <p:cNvPr id="13" name="Text 11"/>
+          <p:cNvPr id="15" name="Text 13"/>
           <p:cNvSpPr/>
           <p:nvPr/>
         </p:nvSpPr>
         <p:spPr>
           <a:xfrm>
-            <a:off x="634901" y="6925866"/>
+            <a:off x="634901" y="6921550"/>
             <a:ext cx="8102798" cy="281880"/>
           </a:xfrm>
           <a:prstGeom prst="rect">
@@ -6152,13 +6594,13 @@
       </p:sp>
       <p:sp>
         <p:nvSpPr>
-          <p:cNvPr id="14" name="Text 12"/>
+          <p:cNvPr id="16" name="Text 14"/>
           <p:cNvSpPr/>
           <p:nvPr/>
         </p:nvSpPr>
         <p:spPr>
           <a:xfrm>
-            <a:off x="406301" y="7296596"/>
+            <a:off x="406301" y="7292280"/>
             <a:ext cx="8498026" cy="426541"/>
           </a:xfrm>
           <a:prstGeom prst="rect">
@@ -6338,13 +6780,13 @@
       </p:sp>
       <p:sp>
         <p:nvSpPr>
-          <p:cNvPr id="15" name="Text 13"/>
+          <p:cNvPr id="17" name="Text 15"/>
           <p:cNvSpPr/>
           <p:nvPr/>
         </p:nvSpPr>
         <p:spPr>
           <a:xfrm>
-            <a:off x="406301" y="7875538"/>
+            <a:off x="406301" y="7871222"/>
             <a:ext cx="8498026" cy="213271"/>
           </a:xfrm>
           <a:prstGeom prst="rect">
